--- a/@Materi Kuliah/Materi_Analisis_Spasial/Presentasi_Analisis_Spasial_Profesional_dari_HTML.pptx
+++ b/@Materi Kuliah/Materi_Analisis_Spasial/Presentasi_Analisis_Spasial_Profesional_dari_HTML.pptx
@@ -2,131 +2,36 @@
 <file path=ppt/presentation.xml><?xml version="1.0" encoding="utf-8"?>
 <p:presentation xmlns:p="http://schemas.openxmlformats.org/presentationml/2006/main">
   <p:sldMasterIdLst>
-    <p:sldMasterId xmlns:r="http://schemas.openxmlformats.org/officeDocument/2006/relationships" id="2147483648" r:id="R60abb48a3df0477c"/>
+    <p:sldMasterId xmlns:r="http://schemas.openxmlformats.org/officeDocument/2006/relationships" id="2147483648" r:id="Rc7514a9663a24773"/>
   </p:sldMasterIdLst>
   <p:notesMasterIdLst>
-    <p:notesMasterId xmlns:r="http://schemas.openxmlformats.org/officeDocument/2006/relationships" r:id="R6220f404425147ab"/>
+    <p:notesMasterId xmlns:r="http://schemas.openxmlformats.org/officeDocument/2006/relationships" r:id="R5871372358b545af"/>
   </p:notesMasterIdLst>
   <p:sldIdLst>
-    <p:sldId xmlns:r="http://schemas.openxmlformats.org/officeDocument/2006/relationships" id="256" r:id="R7d9a34f899504904"/>
-    <p:sldId xmlns:r="http://schemas.openxmlformats.org/officeDocument/2006/relationships" id="257" r:id="Rd8aca0d866364e14"/>
-    <p:sldId xmlns:r="http://schemas.openxmlformats.org/officeDocument/2006/relationships" id="258" r:id="R462354d9627e4c72"/>
-    <p:sldId xmlns:r="http://schemas.openxmlformats.org/officeDocument/2006/relationships" id="259" r:id="R11a3c1d5696b4640"/>
-    <p:sldId xmlns:r="http://schemas.openxmlformats.org/officeDocument/2006/relationships" id="260" r:id="Re092de0179824fec"/>
-    <p:sldId xmlns:r="http://schemas.openxmlformats.org/officeDocument/2006/relationships" id="261" r:id="Ra41f29d7a5714543"/>
-    <p:sldId xmlns:r="http://schemas.openxmlformats.org/officeDocument/2006/relationships" id="262" r:id="R762a64d753634658"/>
-    <p:sldId xmlns:r="http://schemas.openxmlformats.org/officeDocument/2006/relationships" id="263" r:id="R377cd1f0fbb34e82"/>
-    <p:sldId xmlns:r="http://schemas.openxmlformats.org/officeDocument/2006/relationships" id="264" r:id="R694271dc6635497a"/>
-    <p:sldId xmlns:r="http://schemas.openxmlformats.org/officeDocument/2006/relationships" id="265" r:id="R3641094945be4da6"/>
-    <p:sldId xmlns:r="http://schemas.openxmlformats.org/officeDocument/2006/relationships" id="266" r:id="Rfffaada0f4454922"/>
-    <p:sldId xmlns:r="http://schemas.openxmlformats.org/officeDocument/2006/relationships" id="267" r:id="Raf562a0c1b1b4086"/>
-    <p:sldId xmlns:r="http://schemas.openxmlformats.org/officeDocument/2006/relationships" id="268" r:id="R5732177dbdf742ef"/>
-    <p:sldId xmlns:r="http://schemas.openxmlformats.org/officeDocument/2006/relationships" id="269" r:id="Rbf0025adec2d4571"/>
-    <p:sldId xmlns:r="http://schemas.openxmlformats.org/officeDocument/2006/relationships" id="270" r:id="R59ee121fd6e54ae9"/>
-    <p:sldId xmlns:r="http://schemas.openxmlformats.org/officeDocument/2006/relationships" id="271" r:id="R8f1e6ef02d904f20"/>
-    <p:sldId xmlns:r="http://schemas.openxmlformats.org/officeDocument/2006/relationships" id="272" r:id="R33deee716b834f72"/>
-    <p:sldId xmlns:r="http://schemas.openxmlformats.org/officeDocument/2006/relationships" id="273" r:id="Rd0a1eb3fe9dd415d"/>
-    <p:sldId xmlns:r="http://schemas.openxmlformats.org/officeDocument/2006/relationships" id="274" r:id="R5affe2a150e24cd4"/>
-    <p:sldId xmlns:r="http://schemas.openxmlformats.org/officeDocument/2006/relationships" id="275" r:id="R2793f95494064e14"/>
-    <p:sldId xmlns:r="http://schemas.openxmlformats.org/officeDocument/2006/relationships" id="276" r:id="Rccf222ed53de4877"/>
+    <p:sldId xmlns:r="http://schemas.openxmlformats.org/officeDocument/2006/relationships" id="256" r:id="R6fa1092cd31e41f5"/>
+    <p:sldId xmlns:r="http://schemas.openxmlformats.org/officeDocument/2006/relationships" id="257" r:id="R6f2a1d24346a4f8b"/>
+    <p:sldId xmlns:r="http://schemas.openxmlformats.org/officeDocument/2006/relationships" id="258" r:id="Rfa8d578923a04bfe"/>
+    <p:sldId xmlns:r="http://schemas.openxmlformats.org/officeDocument/2006/relationships" id="259" r:id="R56069ecb3326470a"/>
+    <p:sldId xmlns:r="http://schemas.openxmlformats.org/officeDocument/2006/relationships" id="260" r:id="Rb323f8b3beae4329"/>
+    <p:sldId xmlns:r="http://schemas.openxmlformats.org/officeDocument/2006/relationships" id="261" r:id="R5d90c3ec4cb741bd"/>
+    <p:sldId xmlns:r="http://schemas.openxmlformats.org/officeDocument/2006/relationships" id="262" r:id="Rc80ba1f416a2448e"/>
+    <p:sldId xmlns:r="http://schemas.openxmlformats.org/officeDocument/2006/relationships" id="263" r:id="R9e85a2b2a3e742a6"/>
+    <p:sldId xmlns:r="http://schemas.openxmlformats.org/officeDocument/2006/relationships" id="264" r:id="Rbe978ed20fe746c3"/>
+    <p:sldId xmlns:r="http://schemas.openxmlformats.org/officeDocument/2006/relationships" id="265" r:id="R30b473b8ce05440b"/>
+    <p:sldId xmlns:r="http://schemas.openxmlformats.org/officeDocument/2006/relationships" id="266" r:id="R15e634f37ccb4e6c"/>
+    <p:sldId xmlns:r="http://schemas.openxmlformats.org/officeDocument/2006/relationships" id="267" r:id="R3d6da0e8c69e4a83"/>
+    <p:sldId xmlns:r="http://schemas.openxmlformats.org/officeDocument/2006/relationships" id="268" r:id="R43b96e8aeb214fab"/>
+    <p:sldId xmlns:r="http://schemas.openxmlformats.org/officeDocument/2006/relationships" id="269" r:id="Ra75d2e9ab0d6459a"/>
+    <p:sldId xmlns:r="http://schemas.openxmlformats.org/officeDocument/2006/relationships" id="270" r:id="R600f17bf104f49be"/>
+    <p:sldId xmlns:r="http://schemas.openxmlformats.org/officeDocument/2006/relationships" id="271" r:id="R1bab985832e14676"/>
+    <p:sldId xmlns:r="http://schemas.openxmlformats.org/officeDocument/2006/relationships" id="272" r:id="Rf9c01666cb6f4558"/>
+    <p:sldId xmlns:r="http://schemas.openxmlformats.org/officeDocument/2006/relationships" id="273" r:id="Rbf6c31fc0a094e0e"/>
+    <p:sldId xmlns:r="http://schemas.openxmlformats.org/officeDocument/2006/relationships" id="274" r:id="R9555baa919ba48a5"/>
+    <p:sldId xmlns:r="http://schemas.openxmlformats.org/officeDocument/2006/relationships" id="275" r:id="R43e2f5984c704dc2"/>
+    <p:sldId xmlns:r="http://schemas.openxmlformats.org/officeDocument/2006/relationships" id="276" r:id="R73be0a957d2e4bd4"/>
   </p:sldIdLst>
   <p:sldSz cx="12192000" cy="6858000"/>
   <p:notesSz cx="6858000" cy="9144000"/>
-  <p:defaultTextStyle>
-    <a:defPPr xmlns:a="http://schemas.openxmlformats.org/drawingml/2006/main">
-      <a:defRPr lang="en-US"/>
-    </a:defPPr>
-    <a:lvl1pPr xmlns:a="http://schemas.openxmlformats.org/drawingml/2006/main" marL="0" indent="0" algn="l" defTabSz="914400">
-      <a:defRPr sz="1800" kern="1200">
-        <a:solidFill>
-          <a:schemeClr val="tx1"/>
-        </a:solidFill>
-        <a:latin typeface="+mn-lt"/>
-        <a:ea typeface="+mn-ea"/>
-        <a:cs typeface="+mn-cs"/>
-      </a:defRPr>
-    </a:lvl1pPr>
-    <a:lvl2pPr xmlns:a="http://schemas.openxmlformats.org/drawingml/2006/main" marL="457200" indent="0" algn="l" defTabSz="914400">
-      <a:defRPr sz="1800" kern="1200">
-        <a:solidFill>
-          <a:schemeClr val="tx1"/>
-        </a:solidFill>
-        <a:latin typeface="+mn-lt"/>
-        <a:ea typeface="+mn-ea"/>
-        <a:cs typeface="+mn-cs"/>
-      </a:defRPr>
-    </a:lvl2pPr>
-    <a:lvl3pPr xmlns:a="http://schemas.openxmlformats.org/drawingml/2006/main" marL="914400" indent="0" algn="l" defTabSz="914400">
-      <a:defRPr sz="1800" kern="1200">
-        <a:solidFill>
-          <a:schemeClr val="tx1"/>
-        </a:solidFill>
-        <a:latin typeface="+mn-lt"/>
-        <a:ea typeface="+mn-ea"/>
-        <a:cs typeface="+mn-cs"/>
-      </a:defRPr>
-    </a:lvl3pPr>
-    <a:lvl4pPr xmlns:a="http://schemas.openxmlformats.org/drawingml/2006/main" marL="1371600" indent="0" algn="l" defTabSz="914400">
-      <a:defRPr sz="1800" kern="1200">
-        <a:solidFill>
-          <a:schemeClr val="tx1"/>
-        </a:solidFill>
-        <a:latin typeface="+mn-lt"/>
-        <a:ea typeface="+mn-ea"/>
-        <a:cs typeface="+mn-cs"/>
-      </a:defRPr>
-    </a:lvl4pPr>
-    <a:lvl5pPr xmlns:a="http://schemas.openxmlformats.org/drawingml/2006/main" marL="1828800" indent="0" algn="l" defTabSz="914400">
-      <a:defRPr sz="1800" kern="1200">
-        <a:solidFill>
-          <a:schemeClr val="tx1"/>
-        </a:solidFill>
-        <a:latin typeface="+mn-lt"/>
-        <a:ea typeface="+mn-ea"/>
-        <a:cs typeface="+mn-cs"/>
-      </a:defRPr>
-    </a:lvl5pPr>
-    <a:lvl6pPr xmlns:a="http://schemas.openxmlformats.org/drawingml/2006/main" marL="2286000" indent="0" algn="l" defTabSz="914400">
-      <a:defRPr sz="1800" kern="1200">
-        <a:solidFill>
-          <a:schemeClr val="tx1"/>
-        </a:solidFill>
-        <a:latin typeface="+mn-lt"/>
-        <a:ea typeface="+mn-ea"/>
-        <a:cs typeface="+mn-cs"/>
-      </a:defRPr>
-    </a:lvl6pPr>
-    <a:lvl7pPr xmlns:a="http://schemas.openxmlformats.org/drawingml/2006/main" marL="2743200" indent="0" algn="l" defTabSz="914400">
-      <a:defRPr sz="1800" kern="1200">
-        <a:solidFill>
-          <a:schemeClr val="tx1"/>
-        </a:solidFill>
-        <a:latin typeface="+mn-lt"/>
-        <a:ea typeface="+mn-ea"/>
-        <a:cs typeface="+mn-cs"/>
-      </a:defRPr>
-    </a:lvl7pPr>
-    <a:lvl8pPr xmlns:a="http://schemas.openxmlformats.org/drawingml/2006/main" marL="3200400" indent="0" algn="l" defTabSz="914400">
-      <a:defRPr sz="1800" kern="1200">
-        <a:solidFill>
-          <a:schemeClr val="tx1"/>
-        </a:solidFill>
-        <a:latin typeface="+mn-lt"/>
-        <a:ea typeface="+mn-ea"/>
-        <a:cs typeface="+mn-cs"/>
-      </a:defRPr>
-    </a:lvl8pPr>
-    <a:lvl9pPr xmlns:a="http://schemas.openxmlformats.org/drawingml/2006/main" marL="3657600" indent="0" algn="l" defTabSz="914400">
-      <a:defRPr sz="1800" kern="1200">
-        <a:solidFill>
-          <a:schemeClr val="tx1"/>
-        </a:solidFill>
-        <a:latin typeface="+mn-lt"/>
-        <a:ea typeface="+mn-ea"/>
-        <a:cs typeface="+mn-cs"/>
-      </a:defRPr>
-    </a:lvl9pPr>
-  </p:defaultTextStyle>
 </p:presentation>
 </file>
 
@@ -1453,7 +1358,26 @@
         <p:txBody>
           <a:bodyPr xmlns:a="http://schemas.openxmlformats.org/drawingml/2006/main"/>
           <a:lstStyle xmlns:a="http://schemas.openxmlformats.org/drawingml/2006/main"/>
-          <a:p xmlns:a="http://schemas.openxmlformats.org/drawingml/2006/main"/>
+          <a:p xmlns:a="http://schemas.openxmlformats.org/drawingml/2006/main">
+            <a:r>
+              <a:t>[Sources]</a:t>
+            </a:r>
+          </a:p>
+          <a:p xmlns:a="http://schemas.openxmlformats.org/drawingml/2006/main">
+            <a:r>
+              <a:t>- RPS mata kuliah Revisi AI 2026, Program Studi S2 Statistika Terapan FMIPA Universitas Padjadjaran.</a:t>
+            </a:r>
+          </a:p>
+          <a:p xmlns:a="http://schemas.openxmlformats.org/drawingml/2006/main">
+            <a:r>
+              <a:t>[/Sources]</a:t>
+            </a:r>
+          </a:p>
+          <a:p xmlns:a="http://schemas.openxmlformats.org/drawingml/2006/main">
+            <a:r>
+              <a:t>Penutup: CPL tetap. AI adalah akselerator ketercapaian CPMK/Sub-CPMK, bukan pengganti penalaran statistika. Tekankan kewajiban prompt log ringkas, sumber, kode/notebook reproducible, validasi, dan audit trail.</a:t>
+            </a:r>
+          </a:p>
         </p:txBody>
       </p:sp>
       <p:sp>
@@ -2010,8 +1934,8 @@
   </p:cSld>
   <p:clrMap bg1="lt1" tx1="dk1" bg2="lt2" tx2="dk2" accent1="accent1" accent2="accent2" accent3="accent3" accent4="accent4" accent5="accent5" accent6="accent6" hlink="hlink" folHlink="folHlink"/>
   <p:sldLayoutIdLst>
-    <p:sldLayoutId xmlns:r="http://schemas.openxmlformats.org/officeDocument/2006/relationships" id="2147483649" r:id="Rd1587a33ed884d26"/>
-    <p:sldLayoutId xmlns:r="http://schemas.openxmlformats.org/officeDocument/2006/relationships" id="2147483650" r:id="R83acba00911d40ce"/>
+    <p:sldLayoutId xmlns:r="http://schemas.openxmlformats.org/officeDocument/2006/relationships" id="2147483649" r:id="Rd1b2bcd6324041c5"/>
+    <p:sldLayoutId xmlns:r="http://schemas.openxmlformats.org/officeDocument/2006/relationships" id="2147483650" r:id="R1287933ac509462d"/>
   </p:sldLayoutIdLst>
   <p:hf sldNum="0" hdr="0" ftr="0" dt="0"/>
   <p:txStyles>
@@ -2577,7 +2501,7 @@
           <p:nvPr/>
         </p:nvPicPr>
         <p:blipFill>
-          <a:blip xmlns:r="http://schemas.openxmlformats.org/officeDocument/2006/relationships" xmlns:a="http://schemas.openxmlformats.org/drawingml/2006/main" r:embed="R6752f33d2208443c"/>
+          <a:blip xmlns:r="http://schemas.openxmlformats.org/officeDocument/2006/relationships" xmlns:a="http://schemas.openxmlformats.org/drawingml/2006/main" r:embed="R5f0603d7ffd34550"/>
           <a:stretch xmlns:a="http://schemas.openxmlformats.org/drawingml/2006/main">
             <a:fillRect l="0" t="0" r="0" b="0"/>
           </a:stretch>
@@ -2723,7 +2647,7 @@
           <p:nvPr/>
         </p:nvPicPr>
         <p:blipFill>
-          <a:blip xmlns:r="http://schemas.openxmlformats.org/officeDocument/2006/relationships" xmlns:a="http://schemas.openxmlformats.org/drawingml/2006/main" r:embed="Rf7101f5264614901"/>
+          <a:blip xmlns:r="http://schemas.openxmlformats.org/officeDocument/2006/relationships" xmlns:a="http://schemas.openxmlformats.org/drawingml/2006/main" r:embed="Re6773facf9bf456b"/>
           <a:stretch xmlns:a="http://schemas.openxmlformats.org/drawingml/2006/main">
             <a:fillRect l="0" t="0" r="0" b="0"/>
           </a:stretch>
@@ -3329,7 +3253,7 @@
           <p:nvPr/>
         </p:nvPicPr>
         <p:blipFill>
-          <a:blip xmlns:r="http://schemas.openxmlformats.org/officeDocument/2006/relationships" xmlns:a="http://schemas.openxmlformats.org/drawingml/2006/main" r:embed="Rf5c9fee2f7cd4656"/>
+          <a:blip xmlns:r="http://schemas.openxmlformats.org/officeDocument/2006/relationships" xmlns:a="http://schemas.openxmlformats.org/drawingml/2006/main" r:embed="R0855423b994e413c"/>
           <a:stretch xmlns:a="http://schemas.openxmlformats.org/drawingml/2006/main">
             <a:fillRect l="0" t="0" r="0" b="0"/>
           </a:stretch>
@@ -5479,7 +5403,7 @@
           <p:nvPr/>
         </p:nvPicPr>
         <p:blipFill>
-          <a:blip xmlns:r="http://schemas.openxmlformats.org/officeDocument/2006/relationships" xmlns:a="http://schemas.openxmlformats.org/drawingml/2006/main" r:embed="Rf9276f5df0764d70"/>
+          <a:blip xmlns:r="http://schemas.openxmlformats.org/officeDocument/2006/relationships" xmlns:a="http://schemas.openxmlformats.org/drawingml/2006/main" r:embed="R702b637185984a76"/>
           <a:stretch xmlns:a="http://schemas.openxmlformats.org/drawingml/2006/main">
             <a:fillRect l="0" t="0" r="0" b="0"/>
           </a:stretch>
@@ -5758,7 +5682,7 @@
           <p:nvPr/>
         </p:nvPicPr>
         <p:blipFill>
-          <a:blip xmlns:r="http://schemas.openxmlformats.org/officeDocument/2006/relationships" xmlns:a="http://schemas.openxmlformats.org/drawingml/2006/main" r:embed="R6c0d91cfe00748fb"/>
+          <a:blip xmlns:r="http://schemas.openxmlformats.org/officeDocument/2006/relationships" xmlns:a="http://schemas.openxmlformats.org/drawingml/2006/main" r:embed="R824645da952647db"/>
           <a:stretch xmlns:a="http://schemas.openxmlformats.org/drawingml/2006/main">
             <a:fillRect l="0" t="0" r="0" b="0"/>
           </a:stretch>
@@ -7292,7 +7216,7 @@
           <p:nvPr/>
         </p:nvPicPr>
         <p:blipFill>
-          <a:blip xmlns:r="http://schemas.openxmlformats.org/officeDocument/2006/relationships" xmlns:a="http://schemas.openxmlformats.org/drawingml/2006/main" r:embed="R031a4aa3fe01411f"/>
+          <a:blip xmlns:r="http://schemas.openxmlformats.org/officeDocument/2006/relationships" xmlns:a="http://schemas.openxmlformats.org/drawingml/2006/main" r:embed="R70050788bb8e453d"/>
           <a:stretch xmlns:a="http://schemas.openxmlformats.org/drawingml/2006/main">
             <a:fillRect l="0" t="0" r="0" b="0"/>
           </a:stretch>
@@ -8461,7 +8385,7 @@
           <p:nvPr/>
         </p:nvPicPr>
         <p:blipFill>
-          <a:blip xmlns:r="http://schemas.openxmlformats.org/officeDocument/2006/relationships" xmlns:a="http://schemas.openxmlformats.org/drawingml/2006/main" r:embed="Rb96f3d6844634a1a"/>
+          <a:blip xmlns:r="http://schemas.openxmlformats.org/officeDocument/2006/relationships" xmlns:a="http://schemas.openxmlformats.org/drawingml/2006/main" r:embed="Rc6f97ed6bcc742f4"/>
           <a:stretch xmlns:a="http://schemas.openxmlformats.org/drawingml/2006/main">
             <a:fillRect l="0" t="0" r="0" b="0"/>
           </a:stretch>
@@ -9688,7 +9612,7 @@
           <p:nvPr/>
         </p:nvPicPr>
         <p:blipFill>
-          <a:blip xmlns:r="http://schemas.openxmlformats.org/officeDocument/2006/relationships" xmlns:a="http://schemas.openxmlformats.org/drawingml/2006/main" r:embed="R92247a735bc0454b"/>
+          <a:blip xmlns:r="http://schemas.openxmlformats.org/officeDocument/2006/relationships" xmlns:a="http://schemas.openxmlformats.org/drawingml/2006/main" r:embed="R6f9383468dd54313"/>
           <a:stretch xmlns:a="http://schemas.openxmlformats.org/drawingml/2006/main">
             <a:fillRect l="0" t="0" r="0" b="0"/>
           </a:stretch>
@@ -10893,7 +10817,7 @@
           <p:nvPr/>
         </p:nvPicPr>
         <p:blipFill>
-          <a:blip xmlns:r="http://schemas.openxmlformats.org/officeDocument/2006/relationships" xmlns:a="http://schemas.openxmlformats.org/drawingml/2006/main" r:embed="R2ffbe8a490a3429b"/>
+          <a:blip xmlns:r="http://schemas.openxmlformats.org/officeDocument/2006/relationships" xmlns:a="http://schemas.openxmlformats.org/drawingml/2006/main" r:embed="R6a30e7c67bf94cab"/>
           <a:stretch xmlns:a="http://schemas.openxmlformats.org/drawingml/2006/main">
             <a:fillRect l="0" t="0" r="0" b="0"/>
           </a:stretch>
@@ -11172,7 +11096,7 @@
           <p:nvPr/>
         </p:nvPicPr>
         <p:blipFill>
-          <a:blip xmlns:r="http://schemas.openxmlformats.org/officeDocument/2006/relationships" xmlns:a="http://schemas.openxmlformats.org/drawingml/2006/main" r:embed="Ra21692d39525478b"/>
+          <a:blip xmlns:r="http://schemas.openxmlformats.org/officeDocument/2006/relationships" xmlns:a="http://schemas.openxmlformats.org/drawingml/2006/main" r:embed="R14b32b8250a44abd"/>
           <a:stretch xmlns:a="http://schemas.openxmlformats.org/drawingml/2006/main">
             <a:fillRect l="0" t="0" r="0" b="0"/>
           </a:stretch>
@@ -12717,7 +12641,7 @@
           <p:nvPr/>
         </p:nvPicPr>
         <p:blipFill>
-          <a:blip xmlns:r="http://schemas.openxmlformats.org/officeDocument/2006/relationships" xmlns:a="http://schemas.openxmlformats.org/drawingml/2006/main" r:embed="R17d2e92c30624c10"/>
+          <a:blip xmlns:r="http://schemas.openxmlformats.org/officeDocument/2006/relationships" xmlns:a="http://schemas.openxmlformats.org/drawingml/2006/main" r:embed="R7c73dcaf1ab54098"/>
           <a:stretch xmlns:a="http://schemas.openxmlformats.org/drawingml/2006/main">
             <a:fillRect l="0" t="0" r="0" b="0"/>
           </a:stretch>
@@ -14734,7 +14658,7 @@
           <p:nvPr/>
         </p:nvPicPr>
         <p:blipFill>
-          <a:blip xmlns:r="http://schemas.openxmlformats.org/officeDocument/2006/relationships" xmlns:a="http://schemas.openxmlformats.org/drawingml/2006/main" r:embed="R3d97930ce8674cbe"/>
+          <a:blip xmlns:r="http://schemas.openxmlformats.org/officeDocument/2006/relationships" xmlns:a="http://schemas.openxmlformats.org/drawingml/2006/main" r:embed="Rdf2d2dd855b242cb"/>
           <a:stretch xmlns:a="http://schemas.openxmlformats.org/drawingml/2006/main">
             <a:fillRect l="0" t="0" r="0" b="0"/>
           </a:stretch>
@@ -15961,7 +15885,7 @@
           <p:nvPr/>
         </p:nvPicPr>
         <p:blipFill>
-          <a:blip xmlns:r="http://schemas.openxmlformats.org/officeDocument/2006/relationships" xmlns:a="http://schemas.openxmlformats.org/drawingml/2006/main" r:embed="R5e8d9db1adc0421f"/>
+          <a:blip xmlns:r="http://schemas.openxmlformats.org/officeDocument/2006/relationships" xmlns:a="http://schemas.openxmlformats.org/drawingml/2006/main" r:embed="R2c7ebee57df44234"/>
           <a:stretch xmlns:a="http://schemas.openxmlformats.org/drawingml/2006/main">
             <a:fillRect l="0" t="0" r="0" b="0"/>
           </a:stretch>
@@ -17102,7 +17026,7 @@
           <p:nvPr/>
         </p:nvPicPr>
         <p:blipFill>
-          <a:blip xmlns:r="http://schemas.openxmlformats.org/officeDocument/2006/relationships" xmlns:a="http://schemas.openxmlformats.org/drawingml/2006/main" r:embed="Rfd17af2c8500414c"/>
+          <a:blip xmlns:r="http://schemas.openxmlformats.org/officeDocument/2006/relationships" xmlns:a="http://schemas.openxmlformats.org/drawingml/2006/main" r:embed="Rd7079efc51e6400a"/>
           <a:stretch xmlns:a="http://schemas.openxmlformats.org/drawingml/2006/main">
             <a:fillRect l="0" t="0" r="0" b="0"/>
           </a:stretch>
@@ -18567,7 +18491,7 @@
           <p:nvPr/>
         </p:nvPicPr>
         <p:blipFill>
-          <a:blip xmlns:r="http://schemas.openxmlformats.org/officeDocument/2006/relationships" xmlns:a="http://schemas.openxmlformats.org/drawingml/2006/main" r:embed="Rbb4d1ba62c164569"/>
+          <a:blip xmlns:r="http://schemas.openxmlformats.org/officeDocument/2006/relationships" xmlns:a="http://schemas.openxmlformats.org/drawingml/2006/main" r:embed="R9b66059834ac49ab"/>
           <a:stretch xmlns:a="http://schemas.openxmlformats.org/drawingml/2006/main">
             <a:fillRect l="0" t="0" r="0" b="0"/>
           </a:stretch>
@@ -18713,7 +18637,7 @@
           <p:nvPr/>
         </p:nvPicPr>
         <p:blipFill>
-          <a:blip xmlns:r="http://schemas.openxmlformats.org/officeDocument/2006/relationships" xmlns:a="http://schemas.openxmlformats.org/drawingml/2006/main" r:embed="Rd2fbd7335dba4e6f"/>
+          <a:blip xmlns:r="http://schemas.openxmlformats.org/officeDocument/2006/relationships" xmlns:a="http://schemas.openxmlformats.org/drawingml/2006/main" r:embed="Rae50f849d19a450d"/>
           <a:stretch xmlns:a="http://schemas.openxmlformats.org/drawingml/2006/main">
             <a:fillRect l="0" t="0" r="0" b="0"/>
           </a:stretch>
@@ -18817,7 +18741,7 @@
                 <a:ea typeface="Aptos Display"/>
                 <a:cs typeface="Aptos Display"/>
               </a:rPr>
-              <a:t>Dari data menuju</a:t>
+              <a:t>AI mempercepat proses,</a:t>
             </a:r>
           </a:p>
           <a:p xmlns:a="http://schemas.openxmlformats.org/drawingml/2006/main">
@@ -18833,7 +18757,7 @@
                 <a:ea typeface="Aptos Display"/>
                 <a:cs typeface="Aptos Display"/>
               </a:rPr>
-              <a:t>keputusan yang dapat diuji</a:t>
+              <a:t>penalaran tetap memimpin</a:t>
             </a:r>
           </a:p>
         </p:txBody>
@@ -18900,7 +18824,7 @@
         </p:spPr>
         <p:txBody>
           <a:bodyPr xmlns:a="http://schemas.openxmlformats.org/drawingml/2006/main" wrap="square" lIns="635" tIns="635" rIns="635" bIns="635" anchor="t">
-            <a:normAutofit fontScale="100000"/>
+            <a:normAutofit fontScale="93620"/>
           </a:bodyPr>
           <a:lstStyle xmlns:a="http://schemas.openxmlformats.org/drawingml/2006/main"/>
           <a:p xmlns:a="http://schemas.openxmlformats.org/drawingml/2006/main">
@@ -18916,7 +18840,7 @@
                 <a:ea typeface="Aptos"/>
                 <a:cs typeface="Aptos"/>
               </a:rPr>
-              <a:t>Analisis Spasial menghubungkan teori, data, metode, validasi, dan komunikasi untuk menghasilkan keputusan yang sahih, dapat direplikasi, dan bertanggung jawab.</a:t>
+              <a:t>Analisis Spasial memadukan teori, data, komputasi, validasi, dan komunikasi. AI mempercepat eksplorasi dan pemeriksaan awal; mahasiswa tetap memverifikasi asumsi, kode, hasil numerik, ketidakpastian, sumber, dan dampak sebelum mengambil keputusan.</a:t>
             </a:r>
           </a:p>
         </p:txBody>
@@ -19086,7 +19010,7 @@
           <p:nvPr/>
         </p:nvPicPr>
         <p:blipFill>
-          <a:blip xmlns:r="http://schemas.openxmlformats.org/officeDocument/2006/relationships" xmlns:a="http://schemas.openxmlformats.org/drawingml/2006/main" r:embed="Rd86efca3b1294fff"/>
+          <a:blip xmlns:r="http://schemas.openxmlformats.org/officeDocument/2006/relationships" xmlns:a="http://schemas.openxmlformats.org/drawingml/2006/main" r:embed="R6600054873ac4b3e"/>
           <a:stretch xmlns:a="http://schemas.openxmlformats.org/drawingml/2006/main">
             <a:fillRect l="0" t="0" r="0" b="0"/>
           </a:stretch>
@@ -20217,7 +20141,7 @@
           <p:nvPr/>
         </p:nvPicPr>
         <p:blipFill>
-          <a:blip xmlns:r="http://schemas.openxmlformats.org/officeDocument/2006/relationships" xmlns:a="http://schemas.openxmlformats.org/drawingml/2006/main" r:embed="R4c2c26f48f384eeb"/>
+          <a:blip xmlns:r="http://schemas.openxmlformats.org/officeDocument/2006/relationships" xmlns:a="http://schemas.openxmlformats.org/drawingml/2006/main" r:embed="Rb3c2e890c96f4de1"/>
           <a:stretch xmlns:a="http://schemas.openxmlformats.org/drawingml/2006/main">
             <a:fillRect l="0" t="0" r="0" b="0"/>
           </a:stretch>
@@ -22321,7 +22245,7 @@
           <p:nvPr/>
         </p:nvPicPr>
         <p:blipFill>
-          <a:blip xmlns:r="http://schemas.openxmlformats.org/officeDocument/2006/relationships" xmlns:a="http://schemas.openxmlformats.org/drawingml/2006/main" r:embed="R541df8e9df984379"/>
+          <a:blip xmlns:r="http://schemas.openxmlformats.org/officeDocument/2006/relationships" xmlns:a="http://schemas.openxmlformats.org/drawingml/2006/main" r:embed="R1dc09cde32fd47ae"/>
           <a:stretch xmlns:a="http://schemas.openxmlformats.org/drawingml/2006/main">
             <a:fillRect l="0" t="0" r="0" b="0"/>
           </a:stretch>
@@ -23603,7 +23527,7 @@
           <p:nvPr/>
         </p:nvPicPr>
         <p:blipFill>
-          <a:blip xmlns:r="http://schemas.openxmlformats.org/officeDocument/2006/relationships" xmlns:a="http://schemas.openxmlformats.org/drawingml/2006/main" r:embed="R251ccba8c5a84e59"/>
+          <a:blip xmlns:r="http://schemas.openxmlformats.org/officeDocument/2006/relationships" xmlns:a="http://schemas.openxmlformats.org/drawingml/2006/main" r:embed="R34f29b135e8c4171"/>
           <a:stretch xmlns:a="http://schemas.openxmlformats.org/drawingml/2006/main">
             <a:fillRect l="0" t="0" r="0" b="0"/>
           </a:stretch>
@@ -23882,7 +23806,7 @@
           <p:nvPr/>
         </p:nvPicPr>
         <p:blipFill>
-          <a:blip xmlns:r="http://schemas.openxmlformats.org/officeDocument/2006/relationships" xmlns:a="http://schemas.openxmlformats.org/drawingml/2006/main" r:embed="R0c5e0294698b47f2"/>
+          <a:blip xmlns:r="http://schemas.openxmlformats.org/officeDocument/2006/relationships" xmlns:a="http://schemas.openxmlformats.org/drawingml/2006/main" r:embed="Rb32da9f56f744bd6"/>
           <a:stretch xmlns:a="http://schemas.openxmlformats.org/drawingml/2006/main">
             <a:fillRect l="0" t="0" r="0" b="0"/>
           </a:stretch>
@@ -25962,7 +25886,7 @@
           <p:nvPr/>
         </p:nvPicPr>
         <p:blipFill>
-          <a:blip xmlns:r="http://schemas.openxmlformats.org/officeDocument/2006/relationships" xmlns:a="http://schemas.openxmlformats.org/drawingml/2006/main" r:embed="R69c2e12516114e45"/>
+          <a:blip xmlns:r="http://schemas.openxmlformats.org/officeDocument/2006/relationships" xmlns:a="http://schemas.openxmlformats.org/drawingml/2006/main" r:embed="Ra8f04ee702744147"/>
           <a:stretch xmlns:a="http://schemas.openxmlformats.org/drawingml/2006/main">
             <a:fillRect l="0" t="0" r="0" b="0"/>
           </a:stretch>
@@ -27375,7 +27299,7 @@
           <p:nvPr/>
         </p:nvPicPr>
         <p:blipFill>
-          <a:blip xmlns:r="http://schemas.openxmlformats.org/officeDocument/2006/relationships" xmlns:a="http://schemas.openxmlformats.org/drawingml/2006/main" r:embed="Rb8ca035e346546bd"/>
+          <a:blip xmlns:r="http://schemas.openxmlformats.org/officeDocument/2006/relationships" xmlns:a="http://schemas.openxmlformats.org/drawingml/2006/main" r:embed="R0fb12e66966a4d3d"/>
           <a:stretch xmlns:a="http://schemas.openxmlformats.org/drawingml/2006/main">
             <a:fillRect l="0" t="0" r="0" b="0"/>
           </a:stretch>
